--- a/classes/parte-1-redes-y-seguridad-de-redes/041-seguridad-de-dns-envenenamiento-dnssec-y-tunneling/clase-041-presentacion.pptx
+++ b/classes/parte-1-redes-y-seguridad-de-redes/041-seguridad-de-dns-envenenamiento-dnssec-y-tunneling/clase-041-presentacion.pptx
@@ -17,6 +17,9 @@
     <p:sldId id="265" r:id="rId16"/>
     <p:sldId id="266" r:id="rId17"/>
     <p:sldId id="267" r:id="rId18"/>
+    <p:sldId id="268" r:id="rId19"/>
+    <p:sldId id="269" r:id="rId20"/>
+    <p:sldId id="270" r:id="rId21"/>
   </p:sldIdLst>
   <p:sldSz cx="9144000" cy="6858000" type="screen4x3"/>
   <p:notesSz cx="6858000" cy="9144000"/>
@@ -3198,7 +3201,7 @@
                   <a:srgbClr val="0B3D2E"/>
                 </a:solidFill>
               </a:rPr>
-              <a:t>⚠️ Errores comunes</a:t>
+              <a:t>✍️ Ejercicios</a:t>
             </a:r>
           </a:p>
         </p:txBody>
@@ -3236,67 +3239,82 @@
                   <a:srgbClr val="22282E"/>
                 </a:solidFill>
               </a:rPr>
-              <a:t>•  dig +dnssec no muestra RRSIG — El dominio no está firmado o el resolver no reenvía DNSSEC; usa uno que lo soporte</a:t>
-            </a:r>
-          </a:p>
-          <a:p>
-            <a:pPr>
-              <a:spcAft>
-                <a:spcPts val="600"/>
-              </a:spcAft>
-            </a:pPr>
-            <a:r>
-              <a:rPr sz="1500">
-                <a:solidFill>
-                  <a:srgbClr val="22282E"/>
-                </a:solidFill>
-              </a:rPr>
-              <a:t>•  delv devuelve "insecure" — El dominio no tiene cadena de confianza; es esperado en dominios sin firmar</a:t>
-            </a:r>
-          </a:p>
-          <a:p>
-            <a:pPr>
-              <a:spcAft>
-                <a:spcPts val="600"/>
-              </a:spcAft>
-            </a:pPr>
-            <a:r>
-              <a:rPr sz="1500">
-                <a:solidFill>
-                  <a:srgbClr val="22282E"/>
-                </a:solidFill>
-              </a:rPr>
-              <a:t>•  DNSSEC "bogus" en dominios legítimos — Trust anchor desactualizado o reloj desincronizado; actualiza el ancla y sincroniza NTP</a:t>
-            </a:r>
-          </a:p>
-          <a:p>
-            <a:pPr>
-              <a:spcAft>
-                <a:spcPts val="600"/>
-              </a:spcAft>
-            </a:pPr>
-            <a:r>
-              <a:rPr sz="1500">
-                <a:solidFill>
-                  <a:srgbClr val="22282E"/>
-                </a:solidFill>
-              </a:rPr>
-              <a:t>•  iodine no levanta el túnel — Registros NS/A del dominio de delegación mal configurados; revisa la delegación</a:t>
-            </a:r>
-          </a:p>
-          <a:p>
-            <a:pPr>
-              <a:spcAft>
-                <a:spcPts val="600"/>
-              </a:spcAft>
-            </a:pPr>
-            <a:r>
-              <a:rPr sz="1500">
-                <a:solidFill>
-                  <a:srgbClr val="22282E"/>
-                </a:solidFill>
-              </a:rPr>
-              <a:t>•  No detectas el tunneling — Solo miras el tamaño; combina longitud, entropía, tipo de registro y frecuencia</a:t>
+              <a:t>•  Usa dig +dnssec sobre un dominio firmado y uno sin firmar; identifica los registros RRSIG.</a:t>
+            </a:r>
+          </a:p>
+          <a:p>
+            <a:pPr>
+              <a:spcAft>
+                <a:spcPts val="600"/>
+              </a:spcAft>
+            </a:pPr>
+            <a:r>
+              <a:rPr sz="1500">
+                <a:solidFill>
+                  <a:srgbClr val="22282E"/>
+                </a:solidFill>
+              </a:rPr>
+              <a:t>•  Explica por qué DNSSEC no cifra las consultas y qué protocolo sí lo hace (DoT/DoH).</a:t>
+            </a:r>
+          </a:p>
+          <a:p>
+            <a:pPr>
+              <a:spcAft>
+                <a:spcPts val="600"/>
+              </a:spcAft>
+            </a:pPr>
+            <a:r>
+              <a:rPr sz="1500">
+                <a:solidFill>
+                  <a:srgbClr val="22282E"/>
+                </a:solidFill>
+              </a:rPr>
+              <a:t>•  Describe paso a paso el ataque de Kaminsky y las dos mitigaciones que lo frenaron.</a:t>
+            </a:r>
+          </a:p>
+          <a:p>
+            <a:pPr>
+              <a:spcAft>
+                <a:spcPts val="600"/>
+              </a:spcAft>
+            </a:pPr>
+            <a:r>
+              <a:rPr sz="1500">
+                <a:solidFill>
+                  <a:srgbClr val="22282E"/>
+                </a:solidFill>
+              </a:rPr>
+              <a:t>•  En una captura, calcula la longitud media de los nombres consultados y detecta un posible túnel.</a:t>
+            </a:r>
+          </a:p>
+          <a:p>
+            <a:pPr>
+              <a:spcAft>
+                <a:spcPts val="600"/>
+              </a:spcAft>
+            </a:pPr>
+            <a:r>
+              <a:rPr sz="1500">
+                <a:solidFill>
+                  <a:srgbClr val="22282E"/>
+                </a:solidFill>
+              </a:rPr>
+              <a:t>•  Configura DoH en un navegador y verifica con Wireshark que las consultas ya no van en claro.</a:t>
+            </a:r>
+          </a:p>
+          <a:p>
+            <a:pPr>
+              <a:spcAft>
+                <a:spcPts val="600"/>
+              </a:spcAft>
+            </a:pPr>
+            <a:r>
+              <a:rPr sz="1500">
+                <a:solidFill>
+                  <a:srgbClr val="22282E"/>
+                </a:solidFill>
+              </a:rPr>
+              <a:t>•  Investiga cómo Zeek registra las consultas DNS (dns.log) y qué campos ayudan a detectar tunneling.</a:t>
             </a:r>
           </a:p>
         </p:txBody>
@@ -3347,7 +3365,7 @@
                   <a:srgbClr val="0B3D2E"/>
                 </a:solidFill>
               </a:rPr>
-              <a:t>❓ Preguntas frecuentes</a:t>
+              <a:t>📝 Reto verificable</a:t>
             </a:r>
           </a:p>
         </p:txBody>
@@ -3385,97 +3403,22 @@
                   <a:srgbClr val="22282E"/>
                 </a:solidFill>
               </a:rPr>
-              <a:t>•  ❓ ¿DNSSEC cifra mis consultas DNS?</a:t>
-            </a:r>
-          </a:p>
-          <a:p>
-            <a:pPr>
-              <a:spcAft>
-                <a:spcPts val="600"/>
-              </a:spcAft>
-            </a:pPr>
-            <a:r>
-              <a:rPr sz="1500">
-                <a:solidFill>
-                  <a:srgbClr val="22282E"/>
-                </a:solidFill>
-              </a:rPr>
-              <a:t>•  No. DNSSEC garantiza integridad y autenticidad (que la respuesta no fue alterada y proviene de quien dice), pero las consultas siguen viajando en claro. Para confidencialidad usa DoT o DoH.</a:t>
-            </a:r>
-          </a:p>
-          <a:p>
-            <a:pPr>
-              <a:spcAft>
-                <a:spcPts val="600"/>
-              </a:spcAft>
-            </a:pPr>
-            <a:r>
-              <a:rPr sz="1500">
-                <a:solidFill>
-                  <a:srgbClr val="22282E"/>
-                </a:solidFill>
-              </a:rPr>
-              <a:t>•  ❓ ¿Por qué el DNS es un buen canal de exfiltración?</a:t>
-            </a:r>
-          </a:p>
-          <a:p>
-            <a:pPr>
-              <a:spcAft>
-                <a:spcPts val="600"/>
-              </a:spcAft>
-            </a:pPr>
-            <a:r>
-              <a:rPr sz="1500">
-                <a:solidFill>
-                  <a:srgbClr val="22282E"/>
-                </a:solidFill>
-              </a:rPr>
-              <a:t>•  Porque casi todas las redes permiten DNS saliente y pocas lo inspeccionan a fondo. Codificando datos en subdominios se crea un canal que atraviesa muchos firewalls.</a:t>
-            </a:r>
-          </a:p>
-          <a:p>
-            <a:pPr>
-              <a:spcAft>
-                <a:spcPts val="600"/>
-              </a:spcAft>
-            </a:pPr>
-            <a:r>
-              <a:rPr sz="1500">
-                <a:solidFill>
-                  <a:srgbClr val="22282E"/>
-                </a:solidFill>
-              </a:rPr>
-              <a:t>•  ❓ ¿DoH mejora o empeora la seguridad?</a:t>
-            </a:r>
-          </a:p>
-          <a:p>
-            <a:pPr>
-              <a:spcAft>
-                <a:spcPts val="600"/>
-              </a:spcAft>
-            </a:pPr>
-            <a:r>
-              <a:rPr sz="1500">
-                <a:solidFill>
-                  <a:srgbClr val="22282E"/>
-                </a:solidFill>
-              </a:rPr>
-              <a:t>•  Mejora la privacidad frente a observadores, pero dificulta el filtrado y monitoreo corporativo del DNS. Es un equilibrio: bueno para el usuario, reto para el defensor.</a:t>
-            </a:r>
-          </a:p>
-          <a:p>
-            <a:pPr>
-              <a:spcAft>
-                <a:spcPts val="600"/>
-              </a:spcAft>
-            </a:pPr>
-            <a:r>
-              <a:rPr sz="1500">
-                <a:solidFill>
-                  <a:srgbClr val="22282E"/>
-                </a:solidFill>
-              </a:rPr>
-              <a:t>•  ❓ ¿Cómo detecto DNS tunneling sin DNSSEC ni DoH?</a:t>
+              <a:t>•  Monta un resolver con validación DNSSEC y demuestra que rechaza una respuesta falsificada que un resolver sin validación aceptaría (usa dos dominios/servidores de laboratorio). Adicionalmente, genera…</a:t>
+            </a:r>
+          </a:p>
+          <a:p>
+            <a:pPr>
+              <a:spcAft>
+                <a:spcPts val="600"/>
+              </a:spcAft>
+            </a:pPr>
+            <a:r>
+              <a:rPr sz="1500">
+                <a:solidFill>
+                  <a:srgbClr val="22282E"/>
+                </a:solidFill>
+              </a:rPr>
+              <a:t>•  Criterio de aceptación: el resolver validante marca la respuesta manipulada como bogus mientras el no validante la acepta; y tu método de detección señala correctamente el tráfico de túnel frente al…</a:t>
             </a:r>
           </a:p>
         </p:txBody>
@@ -3526,7 +3469,7 @@
                   <a:srgbClr val="0B3D2E"/>
                 </a:solidFill>
               </a:rPr>
-              <a:t>🔗 Referencias</a:t>
+              <a:t>⚠️ Errores comunes</a:t>
             </a:r>
           </a:p>
         </p:txBody>
@@ -3564,6 +3507,334 @@
                   <a:srgbClr val="22282E"/>
                 </a:solidFill>
               </a:rPr>
+              <a:t>•  dig +dnssec no muestra RRSIG — El dominio no está firmado o el resolver no reenvía DNSSEC; usa uno que lo soporte</a:t>
+            </a:r>
+          </a:p>
+          <a:p>
+            <a:pPr>
+              <a:spcAft>
+                <a:spcPts val="600"/>
+              </a:spcAft>
+            </a:pPr>
+            <a:r>
+              <a:rPr sz="1500">
+                <a:solidFill>
+                  <a:srgbClr val="22282E"/>
+                </a:solidFill>
+              </a:rPr>
+              <a:t>•  delv devuelve "insecure" — El dominio no tiene cadena de confianza; es esperado en dominios sin firmar</a:t>
+            </a:r>
+          </a:p>
+          <a:p>
+            <a:pPr>
+              <a:spcAft>
+                <a:spcPts val="600"/>
+              </a:spcAft>
+            </a:pPr>
+            <a:r>
+              <a:rPr sz="1500">
+                <a:solidFill>
+                  <a:srgbClr val="22282E"/>
+                </a:solidFill>
+              </a:rPr>
+              <a:t>•  DNSSEC "bogus" en dominios legítimos — Trust anchor desactualizado o reloj desincronizado; actualiza el ancla y sincroniza NTP</a:t>
+            </a:r>
+          </a:p>
+          <a:p>
+            <a:pPr>
+              <a:spcAft>
+                <a:spcPts val="600"/>
+              </a:spcAft>
+            </a:pPr>
+            <a:r>
+              <a:rPr sz="1500">
+                <a:solidFill>
+                  <a:srgbClr val="22282E"/>
+                </a:solidFill>
+              </a:rPr>
+              <a:t>•  iodine no levanta el túnel — Registros NS/A del dominio de delegación mal configurados; revisa la delegación</a:t>
+            </a:r>
+          </a:p>
+          <a:p>
+            <a:pPr>
+              <a:spcAft>
+                <a:spcPts val="600"/>
+              </a:spcAft>
+            </a:pPr>
+            <a:r>
+              <a:rPr sz="1500">
+                <a:solidFill>
+                  <a:srgbClr val="22282E"/>
+                </a:solidFill>
+              </a:rPr>
+              <a:t>•  No detectas el tunneling — Solo miras el tamaño; combina longitud, entropía, tipo de registro y frecuencia</a:t>
+            </a:r>
+          </a:p>
+        </p:txBody>
+      </p:sp>
+    </p:spTree>
+  </p:cSld>
+  <p:clrMapOvr>
+    <a:masterClrMapping/>
+  </p:clrMapOvr>
+</p:sld>
+</file>
+
+<file path=ppt/slides/slide13.xml><?xml version="1.0" encoding="utf-8"?>
+<p:sld xmlns:a="http://schemas.openxmlformats.org/drawingml/2006/main" xmlns:p="http://schemas.openxmlformats.org/presentationml/2006/main" xmlns:r="http://schemas.openxmlformats.org/officeDocument/2006/relationships">
+  <p:cSld>
+    <p:spTree>
+      <p:nvGrpSpPr>
+        <p:cNvPr id="1" name=""/>
+        <p:cNvGrpSpPr/>
+        <p:nvPr/>
+      </p:nvGrpSpPr>
+      <p:grpSpPr/>
+      <p:sp>
+        <p:nvSpPr>
+          <p:cNvPr id="2" name="TextBox 1"/>
+          <p:cNvSpPr txBox="1"/>
+          <p:nvPr/>
+        </p:nvSpPr>
+        <p:spPr>
+          <a:xfrm>
+            <a:off x="457200" y="320040"/>
+            <a:ext cx="8229600" cy="822960"/>
+          </a:xfrm>
+          <a:prstGeom prst="rect">
+            <a:avLst/>
+          </a:prstGeom>
+          <a:noFill/>
+        </p:spPr>
+        <p:txBody>
+          <a:bodyPr wrap="square">
+            <a:spAutoFit/>
+          </a:bodyPr>
+          <a:lstStyle/>
+          <a:p>
+            <a:r>
+              <a:rPr sz="2600" b="1">
+                <a:solidFill>
+                  <a:srgbClr val="0B3D2E"/>
+                </a:solidFill>
+              </a:rPr>
+              <a:t>❓ Preguntas frecuentes</a:t>
+            </a:r>
+          </a:p>
+        </p:txBody>
+      </p:sp>
+      <p:sp>
+        <p:nvSpPr>
+          <p:cNvPr id="3" name="TextBox 2"/>
+          <p:cNvSpPr txBox="1"/>
+          <p:nvPr/>
+        </p:nvSpPr>
+        <p:spPr>
+          <a:xfrm>
+            <a:off x="457200" y="1280160"/>
+            <a:ext cx="8229600" cy="4937760"/>
+          </a:xfrm>
+          <a:prstGeom prst="rect">
+            <a:avLst/>
+          </a:prstGeom>
+          <a:noFill/>
+        </p:spPr>
+        <p:txBody>
+          <a:bodyPr wrap="square">
+            <a:spAutoFit/>
+          </a:bodyPr>
+          <a:lstStyle/>
+          <a:p>
+            <a:pPr>
+              <a:spcAft>
+                <a:spcPts val="600"/>
+              </a:spcAft>
+            </a:pPr>
+            <a:r>
+              <a:rPr sz="1500">
+                <a:solidFill>
+                  <a:srgbClr val="22282E"/>
+                </a:solidFill>
+              </a:rPr>
+              <a:t>•  ❓ ¿DNSSEC cifra mis consultas DNS?</a:t>
+            </a:r>
+          </a:p>
+          <a:p>
+            <a:pPr>
+              <a:spcAft>
+                <a:spcPts val="600"/>
+              </a:spcAft>
+            </a:pPr>
+            <a:r>
+              <a:rPr sz="1500">
+                <a:solidFill>
+                  <a:srgbClr val="22282E"/>
+                </a:solidFill>
+              </a:rPr>
+              <a:t>•  No. DNSSEC garantiza integridad y autenticidad (que la respuesta no fue alterada y proviene de quien dice), pero las consultas siguen viajando en claro. Para confidencialidad usa DoT o DoH.</a:t>
+            </a:r>
+          </a:p>
+          <a:p>
+            <a:pPr>
+              <a:spcAft>
+                <a:spcPts val="600"/>
+              </a:spcAft>
+            </a:pPr>
+            <a:r>
+              <a:rPr sz="1500">
+                <a:solidFill>
+                  <a:srgbClr val="22282E"/>
+                </a:solidFill>
+              </a:rPr>
+              <a:t>•  ❓ ¿Por qué el DNS es un buen canal de exfiltración?</a:t>
+            </a:r>
+          </a:p>
+          <a:p>
+            <a:pPr>
+              <a:spcAft>
+                <a:spcPts val="600"/>
+              </a:spcAft>
+            </a:pPr>
+            <a:r>
+              <a:rPr sz="1500">
+                <a:solidFill>
+                  <a:srgbClr val="22282E"/>
+                </a:solidFill>
+              </a:rPr>
+              <a:t>•  Porque casi todas las redes permiten DNS saliente y pocas lo inspeccionan a fondo. Codificando datos en subdominios se crea un canal que atraviesa muchos firewalls.</a:t>
+            </a:r>
+          </a:p>
+          <a:p>
+            <a:pPr>
+              <a:spcAft>
+                <a:spcPts val="600"/>
+              </a:spcAft>
+            </a:pPr>
+            <a:r>
+              <a:rPr sz="1500">
+                <a:solidFill>
+                  <a:srgbClr val="22282E"/>
+                </a:solidFill>
+              </a:rPr>
+              <a:t>•  ❓ ¿DoH mejora o empeora la seguridad?</a:t>
+            </a:r>
+          </a:p>
+          <a:p>
+            <a:pPr>
+              <a:spcAft>
+                <a:spcPts val="600"/>
+              </a:spcAft>
+            </a:pPr>
+            <a:r>
+              <a:rPr sz="1500">
+                <a:solidFill>
+                  <a:srgbClr val="22282E"/>
+                </a:solidFill>
+              </a:rPr>
+              <a:t>•  Mejora la privacidad frente a observadores, pero dificulta el filtrado y monitoreo corporativo del DNS. Es un equilibrio: bueno para el usuario, reto para el defensor.</a:t>
+            </a:r>
+          </a:p>
+          <a:p>
+            <a:pPr>
+              <a:spcAft>
+                <a:spcPts val="600"/>
+              </a:spcAft>
+            </a:pPr>
+            <a:r>
+              <a:rPr sz="1500">
+                <a:solidFill>
+                  <a:srgbClr val="22282E"/>
+                </a:solidFill>
+              </a:rPr>
+              <a:t>•  ❓ ¿Cómo detecto DNS tunneling sin DNSSEC ni DoH?</a:t>
+            </a:r>
+          </a:p>
+        </p:txBody>
+      </p:sp>
+    </p:spTree>
+  </p:cSld>
+  <p:clrMapOvr>
+    <a:masterClrMapping/>
+  </p:clrMapOvr>
+</p:sld>
+</file>
+
+<file path=ppt/slides/slide14.xml><?xml version="1.0" encoding="utf-8"?>
+<p:sld xmlns:a="http://schemas.openxmlformats.org/drawingml/2006/main" xmlns:p="http://schemas.openxmlformats.org/presentationml/2006/main" xmlns:r="http://schemas.openxmlformats.org/officeDocument/2006/relationships">
+  <p:cSld>
+    <p:spTree>
+      <p:nvGrpSpPr>
+        <p:cNvPr id="1" name=""/>
+        <p:cNvGrpSpPr/>
+        <p:nvPr/>
+      </p:nvGrpSpPr>
+      <p:grpSpPr/>
+      <p:sp>
+        <p:nvSpPr>
+          <p:cNvPr id="2" name="TextBox 1"/>
+          <p:cNvSpPr txBox="1"/>
+          <p:nvPr/>
+        </p:nvSpPr>
+        <p:spPr>
+          <a:xfrm>
+            <a:off x="457200" y="320040"/>
+            <a:ext cx="8229600" cy="822960"/>
+          </a:xfrm>
+          <a:prstGeom prst="rect">
+            <a:avLst/>
+          </a:prstGeom>
+          <a:noFill/>
+        </p:spPr>
+        <p:txBody>
+          <a:bodyPr wrap="square">
+            <a:spAutoFit/>
+          </a:bodyPr>
+          <a:lstStyle/>
+          <a:p>
+            <a:r>
+              <a:rPr sz="2600" b="1">
+                <a:solidFill>
+                  <a:srgbClr val="0B3D2E"/>
+                </a:solidFill>
+              </a:rPr>
+              <a:t>🔗 Referencias</a:t>
+            </a:r>
+          </a:p>
+        </p:txBody>
+      </p:sp>
+      <p:sp>
+        <p:nvSpPr>
+          <p:cNvPr id="3" name="TextBox 2"/>
+          <p:cNvSpPr txBox="1"/>
+          <p:nvPr/>
+        </p:nvSpPr>
+        <p:spPr>
+          <a:xfrm>
+            <a:off x="457200" y="1280160"/>
+            <a:ext cx="8229600" cy="4937760"/>
+          </a:xfrm>
+          <a:prstGeom prst="rect">
+            <a:avLst/>
+          </a:prstGeom>
+          <a:noFill/>
+        </p:spPr>
+        <p:txBody>
+          <a:bodyPr wrap="square">
+            <a:spAutoFit/>
+          </a:bodyPr>
+          <a:lstStyle/>
+          <a:p>
+            <a:pPr>
+              <a:spcAft>
+                <a:spcPts val="600"/>
+              </a:spcAft>
+            </a:pPr>
+            <a:r>
+              <a:rPr sz="1500">
+                <a:solidFill>
+                  <a:srgbClr val="22282E"/>
+                </a:solidFill>
+              </a:rPr>
               <a:t>•  RFC 4033 — DNS Security Introduction and Requirements (DNSSEC). &lt;https://www.rfc-editor.org/rfc/rfc4033&gt;</a:t>
             </a:r>
           </a:p>
@@ -3614,6 +3885,81 @@
           </a:p>
         </p:txBody>
       </p:sp>
+    </p:spTree>
+  </p:cSld>
+  <p:clrMapOvr>
+    <a:masterClrMapping/>
+  </p:clrMapOvr>
+</p:sld>
+</file>
+
+<file path=ppt/slides/slide15.xml><?xml version="1.0" encoding="utf-8"?>
+<p:sld xmlns:a="http://schemas.openxmlformats.org/drawingml/2006/main" xmlns:p="http://schemas.openxmlformats.org/presentationml/2006/main" xmlns:r="http://schemas.openxmlformats.org/officeDocument/2006/relationships">
+  <p:cSld>
+    <p:spTree>
+      <p:nvGrpSpPr>
+        <p:cNvPr id="1" name=""/>
+        <p:cNvGrpSpPr/>
+        <p:nvPr/>
+      </p:nvGrpSpPr>
+      <p:grpSpPr/>
+      <p:sp>
+        <p:nvSpPr>
+          <p:cNvPr id="2" name="TextBox 1"/>
+          <p:cNvSpPr txBox="1"/>
+          <p:nvPr/>
+        </p:nvSpPr>
+        <p:spPr>
+          <a:xfrm>
+            <a:off x="457200" y="274320"/>
+            <a:ext cx="8229600" cy="640080"/>
+          </a:xfrm>
+          <a:prstGeom prst="rect">
+            <a:avLst/>
+          </a:prstGeom>
+          <a:noFill/>
+        </p:spPr>
+        <p:txBody>
+          <a:bodyPr wrap="square">
+            <a:spAutoFit/>
+          </a:bodyPr>
+          <a:lstStyle/>
+          <a:p>
+            <a:r>
+              <a:rPr sz="2200" b="1">
+                <a:solidFill>
+                  <a:srgbClr val="0B3D2E"/>
+                </a:solidFill>
+              </a:rPr>
+              <a:t>Diagrama de la clase</a:t>
+            </a:r>
+          </a:p>
+        </p:txBody>
+      </p:sp>
+      <p:pic>
+        <p:nvPicPr>
+          <p:cNvPr id="3" name="Picture 2" descr="438dc86e2ac64125.png"/>
+          <p:cNvPicPr>
+            <a:picLocks noChangeAspect="1"/>
+          </p:cNvPicPr>
+          <p:nvPr/>
+        </p:nvPicPr>
+        <p:blipFill>
+          <a:blip r:embed="rId2"/>
+          <a:stretch>
+            <a:fillRect/>
+          </a:stretch>
+        </p:blipFill>
+        <p:spPr>
+          <a:xfrm>
+            <a:off x="457200" y="2903220"/>
+            <a:ext cx="8229600" cy="1691640"/>
+          </a:xfrm>
+          <a:prstGeom prst="rect">
+            <a:avLst/>
+          </a:prstGeom>
+        </p:spPr>
+      </p:pic>
     </p:spTree>
   </p:cSld>
   <p:clrMapOvr>
@@ -3698,7 +4044,7 @@
                   <a:srgbClr val="22282E"/>
                 </a:solidFill>
               </a:rPr>
-              <a:t>•  Estudiar la seguridad del DNS: cómo se falsifican respuestas (cache poisoning, spoofing), cómo DNSSEC garantiza integridad y autenticidad, y cómo el DNS se abusa como canal encubierto (tunneling y exfiltración). El alumno aprenderá a detectar y mitigar estos abusos.</a:t>
+              <a:t>•  Estudiar la seguridad del DNS: cómo se falsifican respuestas (cache poisoning, spoofing), cómo DNSSEC garantiza integridad y autenticidad, y cómo el DNS se abusa como canal encubierto (tunneling y…</a:t>
             </a:r>
           </a:p>
         </p:txBody>
@@ -4107,7 +4453,7 @@
                   <a:srgbClr val="0B3D2E"/>
                 </a:solidFill>
               </a:rPr>
-              <a:t>📖 Definiciones y características</a:t>
+              <a:t>🧠 Explicación en profundidad</a:t>
             </a:r>
           </a:p>
         </p:txBody>
@@ -4145,67 +4491,97 @@
                   <a:srgbClr val="22282E"/>
                 </a:solidFill>
               </a:rPr>
-              <a:t>•  Cache poisoning: inyección de registros falsos en la caché de un resolver para que devuelva IPs controladas por el atacante.</a:t>
-            </a:r>
-          </a:p>
-          <a:p>
-            <a:pPr>
-              <a:spcAft>
-                <a:spcPts val="600"/>
-              </a:spcAft>
-            </a:pPr>
-            <a:r>
-              <a:rPr sz="1500">
-                <a:solidFill>
-                  <a:srgbClr val="22282E"/>
-                </a:solidFill>
-              </a:rPr>
-              <a:t>•  Ataque de Kaminsky: técnica que explotaba la baja entropía del ID de transacción y del puerto para envenenar cachés rápidamente; motivó la aleatorización de puerto de origen y DNSSEC.</a:t>
-            </a:r>
-          </a:p>
-          <a:p>
-            <a:pPr>
-              <a:spcAft>
-                <a:spcPts val="600"/>
-              </a:spcAft>
-            </a:pPr>
-            <a:r>
-              <a:rPr sz="1500">
-                <a:solidFill>
-                  <a:srgbClr val="22282E"/>
-                </a:solidFill>
-              </a:rPr>
-              <a:t>•  DNSSEC: extensiones que firman criptográficamente los registros (RRSIG) con claves (DNSKEY) encadenadas por registros DS hasta la raíz; garantiza integridad y autenticidad, no confidencialidad.</a:t>
-            </a:r>
-          </a:p>
-          <a:p>
-            <a:pPr>
-              <a:spcAft>
-                <a:spcPts val="600"/>
-              </a:spcAft>
-            </a:pPr>
-            <a:r>
-              <a:rPr sz="1500">
-                <a:solidFill>
-                  <a:srgbClr val="22282E"/>
-                </a:solidFill>
-              </a:rPr>
-              <a:t>•  DNS tunneling: encapsulación de datos arbitrarios en consultas/respuestas DNS para crear un canal (exfiltración o C2) que atraviesa firewalls que permiten DNS.</a:t>
-            </a:r>
-          </a:p>
-          <a:p>
-            <a:pPr>
-              <a:spcAft>
-                <a:spcPts val="600"/>
-              </a:spcAft>
-            </a:pPr>
-            <a:r>
-              <a:rPr sz="1500">
-                <a:solidFill>
-                  <a:srgbClr val="22282E"/>
-                </a:solidFill>
-              </a:rPr>
-              <a:t>•  DoT / DoH: DNS sobre TLS / sobre HTTPS; cifran la consulta para proteger la privacidad frente a observadores en la red.</a:t>
+              <a:t>•  El DNS traduce nombres en direcciones, y esa función tan modesta lo convierte en el</a:t>
+            </a:r>
+          </a:p>
+          <a:p>
+            <a:pPr>
+              <a:spcAft>
+                <a:spcPts val="600"/>
+              </a:spcAft>
+            </a:pPr>
+            <a:r>
+              <a:rPr sz="1500">
+                <a:solidFill>
+                  <a:srgbClr val="22282E"/>
+                </a:solidFill>
+              </a:rPr>
+              <a:t>•  punto de confianza del que cuelga toda la navegación: quien controla la respuesta DNS</a:t>
+            </a:r>
+          </a:p>
+          <a:p>
+            <a:pPr>
+              <a:spcAft>
+                <a:spcPts val="600"/>
+              </a:spcAft>
+            </a:pPr>
+            <a:r>
+              <a:rPr sz="1500">
+                <a:solidFill>
+                  <a:srgbClr val="22282E"/>
+                </a:solidFill>
+              </a:rPr>
+              <a:t>•  decide a qué servidor te conectas realmente, por muy bien que escribas el nombre. El</a:t>
+            </a:r>
+          </a:p>
+          <a:p>
+            <a:pPr>
+              <a:spcAft>
+                <a:spcPts val="600"/>
+              </a:spcAft>
+            </a:pPr>
+            <a:r>
+              <a:rPr sz="1500">
+                <a:solidFill>
+                  <a:srgbClr val="22282E"/>
+                </a:solidFill>
+              </a:rPr>
+              <a:t>•  problema de origen es que el DNS clásico viaja sobre UDP sin autenticación, así que</a:t>
+            </a:r>
+          </a:p>
+          <a:p>
+            <a:pPr>
+              <a:spcAft>
+                <a:spcPts val="600"/>
+              </a:spcAft>
+            </a:pPr>
+            <a:r>
+              <a:rPr sz="1500">
+                <a:solidFill>
+                  <a:srgbClr val="22282E"/>
+                </a:solidFill>
+              </a:rPr>
+              <a:t>•  el resolver acepta la primera respuesta que encaje con su pregunta sin comprobar quién la</a:t>
+            </a:r>
+          </a:p>
+          <a:p>
+            <a:pPr>
+              <a:spcAft>
+                <a:spcPts val="600"/>
+              </a:spcAft>
+            </a:pPr>
+            <a:r>
+              <a:rPr sz="1500">
+                <a:solidFill>
+                  <a:srgbClr val="22282E"/>
+                </a:solidFill>
+              </a:rPr>
+              <a:t>•  envía. Entender la jerarquía —raíz, TLD, servidor autoritativo del dominio, y el resolver</a:t>
+            </a:r>
+          </a:p>
+          <a:p>
+            <a:pPr>
+              <a:spcAft>
+                <a:spcPts val="600"/>
+              </a:spcAft>
+            </a:pPr>
+            <a:r>
+              <a:rPr sz="1500">
+                <a:solidFill>
+                  <a:srgbClr val="22282E"/>
+                </a:solidFill>
+              </a:rPr>
+              <a:t>•  recursivo que hace las preguntas por ti y cachea lo que aprende— es lo que permite</a:t>
             </a:r>
           </a:p>
         </p:txBody>
@@ -4256,7 +4632,7 @@
                   <a:srgbClr val="0B3D2E"/>
                 </a:solidFill>
               </a:rPr>
-              <a:t>🧰 Herramientas y preparación</a:t>
+              <a:t>📖 Definiciones y características</a:t>
             </a:r>
           </a:p>
         </p:txBody>
@@ -4294,52 +4670,67 @@
                   <a:srgbClr val="22282E"/>
                 </a:solidFill>
               </a:rPr>
-              <a:t>•  dig / delv para consultas y validación DNSSEC.</a:t>
-            </a:r>
-          </a:p>
-          <a:p>
-            <a:pPr>
-              <a:spcAft>
-                <a:spcPts val="600"/>
-              </a:spcAft>
-            </a:pPr>
-            <a:r>
-              <a:rPr sz="1500">
-                <a:solidFill>
-                  <a:srgbClr val="22282E"/>
-                </a:solidFill>
-              </a:rPr>
-              <a:t>•  BIND9 o unbound como resolver de laboratorio.</a:t>
-            </a:r>
-          </a:p>
-          <a:p>
-            <a:pPr>
-              <a:spcAft>
-                <a:spcPts val="600"/>
-              </a:spcAft>
-            </a:pPr>
-            <a:r>
-              <a:rPr sz="1500">
-                <a:solidFill>
-                  <a:srgbClr val="22282E"/>
-                </a:solidFill>
-              </a:rPr>
-              <a:t>•  iodine o dnscat2 para practicar tunneling (en laboratorio).</a:t>
-            </a:r>
-          </a:p>
-          <a:p>
-            <a:pPr>
-              <a:spcAft>
-                <a:spcPts val="600"/>
-              </a:spcAft>
-            </a:pPr>
-            <a:r>
-              <a:rPr sz="1500">
-                <a:solidFill>
-                  <a:srgbClr val="22282E"/>
-                </a:solidFill>
-              </a:rPr>
-              <a:t>•  Zeek/Suricata (clases 035/044) para detección.</a:t>
+              <a:t>•  Cache poisoning: inyección de registros falsos en la caché de un resolver para que devuelva IPs controladas por el atacante.</a:t>
+            </a:r>
+          </a:p>
+          <a:p>
+            <a:pPr>
+              <a:spcAft>
+                <a:spcPts val="600"/>
+              </a:spcAft>
+            </a:pPr>
+            <a:r>
+              <a:rPr sz="1500">
+                <a:solidFill>
+                  <a:srgbClr val="22282E"/>
+                </a:solidFill>
+              </a:rPr>
+              <a:t>•  Ataque de Kaminsky: técnica que explotaba la baja entropía del ID de transacción y del puerto para envenenar cachés rápidamente; motivó la aleatorización de puerto de origen y DNSSEC.</a:t>
+            </a:r>
+          </a:p>
+          <a:p>
+            <a:pPr>
+              <a:spcAft>
+                <a:spcPts val="600"/>
+              </a:spcAft>
+            </a:pPr>
+            <a:r>
+              <a:rPr sz="1500">
+                <a:solidFill>
+                  <a:srgbClr val="22282E"/>
+                </a:solidFill>
+              </a:rPr>
+              <a:t>•  DNSSEC: extensiones que firman criptográficamente los registros (RRSIG) con claves (DNSKEY) encadenadas por registros DS hasta la raíz; garantiza integridad y autenticidad, no confidencialidad.</a:t>
+            </a:r>
+          </a:p>
+          <a:p>
+            <a:pPr>
+              <a:spcAft>
+                <a:spcPts val="600"/>
+              </a:spcAft>
+            </a:pPr>
+            <a:r>
+              <a:rPr sz="1500">
+                <a:solidFill>
+                  <a:srgbClr val="22282E"/>
+                </a:solidFill>
+              </a:rPr>
+              <a:t>•  DNS tunneling: encapsulación de datos arbitrarios en consultas/respuestas DNS para crear un canal (exfiltración o C2) que atraviesa firewalls que permiten DNS.</a:t>
+            </a:r>
+          </a:p>
+          <a:p>
+            <a:pPr>
+              <a:spcAft>
+                <a:spcPts val="600"/>
+              </a:spcAft>
+            </a:pPr>
+            <a:r>
+              <a:rPr sz="1500">
+                <a:solidFill>
+                  <a:srgbClr val="22282E"/>
+                </a:solidFill>
+              </a:rPr>
+              <a:t>•  DoT / DoH: DNS sobre TLS / sobre HTTPS; cifran la consulta para proteger la privacidad frente a observadores en la red.</a:t>
             </a:r>
           </a:p>
         </p:txBody>
@@ -4390,7 +4781,7 @@
                   <a:srgbClr val="0B3D2E"/>
                 </a:solidFill>
               </a:rPr>
-              <a:t>🧪 Laboratorio guiado</a:t>
+              <a:t>📔 Glosario</a:t>
             </a:r>
           </a:p>
         </p:txBody>
@@ -4428,97 +4819,97 @@
                   <a:srgbClr val="22282E"/>
                 </a:solidFill>
               </a:rPr>
-              <a:t>•  Observa una resolución completa y sus servidores:</a:t>
-            </a:r>
-          </a:p>
-          <a:p>
-            <a:pPr>
-              <a:spcAft>
-                <a:spcPts val="600"/>
-              </a:spcAft>
-            </a:pPr>
-            <a:r>
-              <a:rPr sz="1500">
-                <a:solidFill>
-                  <a:srgbClr val="22282E"/>
-                </a:solidFill>
-              </a:rPr>
-              <a:t>•  dig +trace example.com</a:t>
-            </a:r>
-          </a:p>
-          <a:p>
-            <a:pPr>
-              <a:spcAft>
-                <a:spcPts val="600"/>
-              </a:spcAft>
-            </a:pPr>
-            <a:r>
-              <a:rPr sz="1500">
-                <a:solidFill>
-                  <a:srgbClr val="22282E"/>
-                </a:solidFill>
-              </a:rPr>
-              <a:t>•  Valida DNSSEC de un dominio firmado:</a:t>
-            </a:r>
-          </a:p>
-          <a:p>
-            <a:pPr>
-              <a:spcAft>
-                <a:spcPts val="600"/>
-              </a:spcAft>
-            </a:pPr>
-            <a:r>
-              <a:rPr sz="1500">
-                <a:solidFill>
-                  <a:srgbClr val="22282E"/>
-                </a:solidFill>
-              </a:rPr>
-              <a:t>•  dig +dnssec example.com</a:t>
-            </a:r>
-          </a:p>
-          <a:p>
-            <a:pPr>
-              <a:spcAft>
-                <a:spcPts val="600"/>
-              </a:spcAft>
-            </a:pPr>
-            <a:r>
-              <a:rPr sz="1500">
-                <a:solidFill>
-                  <a:srgbClr val="22282E"/>
-                </a:solidFill>
-              </a:rPr>
-              <a:t>•  delv example.com          # muestra "fully validated" si la cadena es correcta</a:t>
-            </a:r>
-          </a:p>
-          <a:p>
-            <a:pPr>
-              <a:spcAft>
-                <a:spcPts val="600"/>
-              </a:spcAft>
-            </a:pPr>
-            <a:r>
-              <a:rPr sz="1500">
-                <a:solidFill>
-                  <a:srgbClr val="22282E"/>
-                </a:solidFill>
-              </a:rPr>
-              <a:t>•  Configura un resolver validante (unbound) con auto-trust-anchor-file apuntando a la raíz y verifica que rechaza respuestas manipuladas.</a:t>
-            </a:r>
-          </a:p>
-          <a:p>
-            <a:pPr>
-              <a:spcAft>
-                <a:spcPts val="600"/>
-              </a:spcAft>
-            </a:pPr>
-            <a:r>
-              <a:rPr sz="1500">
-                <a:solidFill>
-                  <a:srgbClr val="22282E"/>
-                </a:solidFill>
-              </a:rPr>
-              <a:t>•  Simula spoofing en laboratorio: con dos resolvers (uno sin DNSSEC y otro con validación), inyecta una respuesta falsa y compara: el validante la descarta.</a:t>
+              <a:t>•  Término — Definición concisa</a:t>
+            </a:r>
+          </a:p>
+          <a:p>
+            <a:pPr>
+              <a:spcAft>
+                <a:spcPts val="600"/>
+              </a:spcAft>
+            </a:pPr>
+            <a:r>
+              <a:rPr sz="1500">
+                <a:solidFill>
+                  <a:srgbClr val="22282E"/>
+                </a:solidFill>
+              </a:rPr>
+              <a:t>•  Resolver recursivo — Servidor que resuelve consultas por el cliente y cachea el resultado</a:t>
+            </a:r>
+          </a:p>
+          <a:p>
+            <a:pPr>
+              <a:spcAft>
+                <a:spcPts val="600"/>
+              </a:spcAft>
+            </a:pPr>
+            <a:r>
+              <a:rPr sz="1500">
+                <a:solidFill>
+                  <a:srgbClr val="22282E"/>
+                </a:solidFill>
+              </a:rPr>
+              <a:t>•  Servidor autoritativo — El que tiene la verdad de una zona DNS</a:t>
+            </a:r>
+          </a:p>
+          <a:p>
+            <a:pPr>
+              <a:spcAft>
+                <a:spcPts val="600"/>
+              </a:spcAft>
+            </a:pPr>
+            <a:r>
+              <a:rPr sz="1500">
+                <a:solidFill>
+                  <a:srgbClr val="22282E"/>
+                </a:solidFill>
+              </a:rPr>
+              <a:t>•  TTL — Tiempo que una respuesta permanece en caché</a:t>
+            </a:r>
+          </a:p>
+          <a:p>
+            <a:pPr>
+              <a:spcAft>
+                <a:spcPts val="600"/>
+              </a:spcAft>
+            </a:pPr>
+            <a:r>
+              <a:rPr sz="1500">
+                <a:solidFill>
+                  <a:srgbClr val="22282E"/>
+                </a:solidFill>
+              </a:rPr>
+              <a:t>•  Cache poisoning — Inyectar una respuesta falsa en la caché de un resolver</a:t>
+            </a:r>
+          </a:p>
+          <a:p>
+            <a:pPr>
+              <a:spcAft>
+                <a:spcPts val="600"/>
+              </a:spcAft>
+            </a:pPr>
+            <a:r>
+              <a:rPr sz="1500">
+                <a:solidFill>
+                  <a:srgbClr val="22282E"/>
+                </a:solidFill>
+              </a:rPr>
+              <a:t>•  Ataque de Kaminsky — Técnica que multiplicó las opciones de envenenar una caché</a:t>
+            </a:r>
+          </a:p>
+          <a:p>
+            <a:pPr>
+              <a:spcAft>
+                <a:spcPts val="600"/>
+              </a:spcAft>
+            </a:pPr>
+            <a:r>
+              <a:rPr sz="1500">
+                <a:solidFill>
+                  <a:srgbClr val="22282E"/>
+                </a:solidFill>
+              </a:rPr>
+              <a:t>•  Aleatorización de puerto — Mitigación que amplió el espacio a adivinar del atacante</a:t>
             </a:r>
           </a:p>
         </p:txBody>
@@ -4569,7 +4960,7 @@
                   <a:srgbClr val="0B3D2E"/>
                 </a:solidFill>
               </a:rPr>
-              <a:t>✍️ Ejercicios</a:t>
+              <a:t>🧰 Herramientas y preparación</a:t>
             </a:r>
           </a:p>
         </p:txBody>
@@ -4607,82 +4998,52 @@
                   <a:srgbClr val="22282E"/>
                 </a:solidFill>
               </a:rPr>
-              <a:t>•  Usa dig +dnssec sobre un dominio firmado y uno sin firmar; identifica los registros RRSIG.</a:t>
-            </a:r>
-          </a:p>
-          <a:p>
-            <a:pPr>
-              <a:spcAft>
-                <a:spcPts val="600"/>
-              </a:spcAft>
-            </a:pPr>
-            <a:r>
-              <a:rPr sz="1500">
-                <a:solidFill>
-                  <a:srgbClr val="22282E"/>
-                </a:solidFill>
-              </a:rPr>
-              <a:t>•  Explica por qué DNSSEC no cifra las consultas y qué protocolo sí lo hace (DoT/DoH).</a:t>
-            </a:r>
-          </a:p>
-          <a:p>
-            <a:pPr>
-              <a:spcAft>
-                <a:spcPts val="600"/>
-              </a:spcAft>
-            </a:pPr>
-            <a:r>
-              <a:rPr sz="1500">
-                <a:solidFill>
-                  <a:srgbClr val="22282E"/>
-                </a:solidFill>
-              </a:rPr>
-              <a:t>•  Describe paso a paso el ataque de Kaminsky y las dos mitigaciones que lo frenaron.</a:t>
-            </a:r>
-          </a:p>
-          <a:p>
-            <a:pPr>
-              <a:spcAft>
-                <a:spcPts val="600"/>
-              </a:spcAft>
-            </a:pPr>
-            <a:r>
-              <a:rPr sz="1500">
-                <a:solidFill>
-                  <a:srgbClr val="22282E"/>
-                </a:solidFill>
-              </a:rPr>
-              <a:t>•  En una captura, calcula la longitud media de los nombres consultados y detecta un posible túnel.</a:t>
-            </a:r>
-          </a:p>
-          <a:p>
-            <a:pPr>
-              <a:spcAft>
-                <a:spcPts val="600"/>
-              </a:spcAft>
-            </a:pPr>
-            <a:r>
-              <a:rPr sz="1500">
-                <a:solidFill>
-                  <a:srgbClr val="22282E"/>
-                </a:solidFill>
-              </a:rPr>
-              <a:t>•  Configura DoH en un navegador y verifica con Wireshark que las consultas ya no van en claro.</a:t>
-            </a:r>
-          </a:p>
-          <a:p>
-            <a:pPr>
-              <a:spcAft>
-                <a:spcPts val="600"/>
-              </a:spcAft>
-            </a:pPr>
-            <a:r>
-              <a:rPr sz="1500">
-                <a:solidFill>
-                  <a:srgbClr val="22282E"/>
-                </a:solidFill>
-              </a:rPr>
-              <a:t>•  Investiga cómo Zeek registra las consultas DNS (dns.log) y qué campos ayudan a detectar tunneling.</a:t>
+              <a:t>•  dig / delv para consultas y validación DNSSEC.</a:t>
+            </a:r>
+          </a:p>
+          <a:p>
+            <a:pPr>
+              <a:spcAft>
+                <a:spcPts val="600"/>
+              </a:spcAft>
+            </a:pPr>
+            <a:r>
+              <a:rPr sz="1500">
+                <a:solidFill>
+                  <a:srgbClr val="22282E"/>
+                </a:solidFill>
+              </a:rPr>
+              <a:t>•  BIND9 o unbound como resolver de laboratorio.</a:t>
+            </a:r>
+          </a:p>
+          <a:p>
+            <a:pPr>
+              <a:spcAft>
+                <a:spcPts val="600"/>
+              </a:spcAft>
+            </a:pPr>
+            <a:r>
+              <a:rPr sz="1500">
+                <a:solidFill>
+                  <a:srgbClr val="22282E"/>
+                </a:solidFill>
+              </a:rPr>
+              <a:t>•  iodine o dnscat2 para practicar tunneling (en laboratorio).</a:t>
+            </a:r>
+          </a:p>
+          <a:p>
+            <a:pPr>
+              <a:spcAft>
+                <a:spcPts val="600"/>
+              </a:spcAft>
+            </a:pPr>
+            <a:r>
+              <a:rPr sz="1500">
+                <a:solidFill>
+                  <a:srgbClr val="22282E"/>
+                </a:solidFill>
+              </a:rPr>
+              <a:t>•  Zeek/Suricata (clases 035/044) para detección.</a:t>
             </a:r>
           </a:p>
         </p:txBody>
@@ -4733,7 +5094,7 @@
                   <a:srgbClr val="0B3D2E"/>
                 </a:solidFill>
               </a:rPr>
-              <a:t>📝 Reto verificable</a:t>
+              <a:t>🧪 Laboratorio guiado</a:t>
             </a:r>
           </a:p>
         </p:txBody>
@@ -4771,22 +5132,97 @@
                   <a:srgbClr val="22282E"/>
                 </a:solidFill>
               </a:rPr>
-              <a:t>•  Monta un resolver con validación DNSSEC y demuestra que rechaza una respuesta falsificada que un resolver sin validación aceptaría (usa dos dominios/servidores de laboratorio). Adicionalmente, genera tráfico de DNS tunneling en tu laboratorio y entrega un método reproducible (comando/consulta) que lo detecte por longitud o entropía de los nombres.</a:t>
-            </a:r>
-          </a:p>
-          <a:p>
-            <a:pPr>
-              <a:spcAft>
-                <a:spcPts val="600"/>
-              </a:spcAft>
-            </a:pPr>
-            <a:r>
-              <a:rPr sz="1500">
-                <a:solidFill>
-                  <a:srgbClr val="22282E"/>
-                </a:solidFill>
-              </a:rPr>
-              <a:t>•  Criterio de aceptación: el resolver validante marca la respuesta manipulada como bogus mientras el no validante la acepta; y tu método de detección señala correctamente el tráfico de túnel frente al DNS legítimo.</a:t>
+              <a:t>•  Observa una resolución completa y sus servidores:</a:t>
+            </a:r>
+          </a:p>
+          <a:p>
+            <a:pPr>
+              <a:spcAft>
+                <a:spcPts val="600"/>
+              </a:spcAft>
+            </a:pPr>
+            <a:r>
+              <a:rPr sz="1500">
+                <a:solidFill>
+                  <a:srgbClr val="22282E"/>
+                </a:solidFill>
+              </a:rPr>
+              <a:t>•  Valida DNSSEC de un dominio firmado:</a:t>
+            </a:r>
+          </a:p>
+          <a:p>
+            <a:pPr>
+              <a:spcAft>
+                <a:spcPts val="600"/>
+              </a:spcAft>
+            </a:pPr>
+            <a:r>
+              <a:rPr sz="1500">
+                <a:solidFill>
+                  <a:srgbClr val="22282E"/>
+                </a:solidFill>
+              </a:rPr>
+              <a:t>•  Configura un resolver validante (unbound) con auto-trust-anchor-file apuntando a la raíz y verifica que rechaza respuestas manipuladas.</a:t>
+            </a:r>
+          </a:p>
+          <a:p>
+            <a:pPr>
+              <a:spcAft>
+                <a:spcPts val="600"/>
+              </a:spcAft>
+            </a:pPr>
+            <a:r>
+              <a:rPr sz="1500">
+                <a:solidFill>
+                  <a:srgbClr val="22282E"/>
+                </a:solidFill>
+              </a:rPr>
+              <a:t>•  Simula spoofing en laboratorio: con dos resolvers (uno sin DNSSEC y otro con validación), inyecta una respuesta falsa y compara: el validante la descarta.</a:t>
+            </a:r>
+          </a:p>
+          <a:p>
+            <a:pPr>
+              <a:spcAft>
+                <a:spcPts val="600"/>
+              </a:spcAft>
+            </a:pPr>
+            <a:r>
+              <a:rPr sz="1500">
+                <a:solidFill>
+                  <a:srgbClr val="22282E"/>
+                </a:solidFill>
+              </a:rPr>
+              <a:t>•  DNS tunneling con iodine (esquema, en tu laboratorio): levanta el servidor iodined en un dominio de pruebas y conecta el cliente iodine; observa el túnel encapsulado en consultas.</a:t>
+            </a:r>
+          </a:p>
+          <a:p>
+            <a:pPr>
+              <a:spcAft>
+                <a:spcPts val="600"/>
+              </a:spcAft>
+            </a:pPr>
+            <a:r>
+              <a:rPr sz="1500">
+                <a:solidFill>
+                  <a:srgbClr val="22282E"/>
+                </a:solidFill>
+              </a:rPr>
+              <a:t>•  Detección: captura tráfico DNS y busca indicadores de tunneling:</a:t>
+            </a:r>
+          </a:p>
+          <a:p>
+            <a:pPr>
+              <a:spcAft>
+                <a:spcPts val="600"/>
+              </a:spcAft>
+            </a:pPr>
+            <a:r>
+              <a:rPr sz="1500">
+                <a:solidFill>
+                  <a:srgbClr val="22282E"/>
+                </a:solidFill>
+              </a:rPr>
+              <a:t>•  Nombres largos, alta entropía y muchas consultas TXT/NULL son sospechosos.</a:t>
             </a:r>
           </a:p>
         </p:txBody>
